--- a/docs/MLflow-Workshop.pptx
+++ b/docs/MLflow-Workshop.pptx
@@ -504,7 +504,7 @@
           <a:p>
             <a:r>
               <a:rPr lang="en-US" dirty="0"/>
-              <a:t>Station 1+2: MLflow braucht nur DB + Objektspeicher — beides schon da. Ein Container mlflow, Backend=Postgres, Artefakte=MinIO, UI 5555.</a:t>
+              <a:t>MLflow braucht nur DB + Objektspeicher — beides hat das Lakehouse schon. Backend-Store = PostgreSQL (Runs, Parameter, Metriken), Artifact-Store = MinIO (Modelle, Plots, Reports). Trainingsdaten aus dem Iceberg-raw-Layer via Trino, Training in Jupyter, Protokoll gegen MLflow (UI 5555). Ein zusaetzlicher Container mlflow — mehr Infrastruktur war nicht noetig.</a:t>
             </a:r>
             <a:endParaRPr lang="en-US" dirty="0"/>
           </a:p>
@@ -592,7 +592,7 @@
           <a:p>
             <a:r>
               <a:rPr lang="en-US" dirty="0"/>
-              <a:t>Station 3-5: Features aus dem See via Trino. KMeans k-Sweep, jeder Lauf ein MLflow-Run. 10 Fonds/30 Firmen, volle ISIN-Coverage. Bestes Modell k=2.</a:t>
+              <a:t>Feature-Engineering per Trino-Join: Fondspositionen x Emittenten-Emissionen ueber ISIN, gewichtet (weight_pct summiert je Fonds auf 100%). w_scope1 = Sigma(Gewicht% x Scope-1) — ein Financed-Emissions-Proxy, KEINE umsatznormierte Intensitaet. KMeans mit k-Sweep, jeder Lauf ein MLflow-Run. 10 Fonds/30 Firmen, volle ISIN-Coverage -&gt; zu wenig fuer ueberwachtes Lernen, daher Clustering. Bestes Modell k=2.</a:t>
             </a:r>
             <a:endParaRPr lang="en-US" dirty="0"/>
           </a:p>
@@ -680,7 +680,7 @@
           <a:p>
             <a:r>
               <a:rPr lang="en-US" dirty="0"/>
-              <a:t>Station 6-7: Inertia faellt monoton, Silhouette maximal bei k=2 -&gt; mehr Cluster ist nicht besser. Go-Live per Registry-Promotion auf Production. Ausblick: Batch-Scoring in curated.fund_esg, FastAPI-Serving.</a:t>
+              <a:t>Inertia faellt monoton, Silhouette maximal bei k=2 (0,266) -&gt; mehr Cluster ist nicht besser. Ergebnis: Cluster 0 'CO2-intensiver' (7 Fonds, Oe w_scope1 ~8,4M, ~14% Energy), Cluster 1 'emissionsaermer' (3 Fonds, ~5,1M, ~7,5% Energy) — Trennung primaer entlang w_scope1. Diskussionspunkte: 'Nachhaltigkeit Renten' hat den HOECHSTEN Fussabdruck (12M) trotz Name; auch der 'Paris Climate'-Indexfonds liegt im CO2-intensiven Cluster -&gt; Name != gemessener Fussabdruck. Grenzen: 10 Fonds, synthetisch, Proxy statt WACI. Go-Live per Registry-Promotion auf Production. Ausblick: Batch-Scoring in curated.fund_esg (per SQL abfragbar), FastAPI-Serving.</a:t>
             </a:r>
             <a:endParaRPr lang="en-US" dirty="0"/>
           </a:p>
